--- a/content/sessions/slides/Session-2-Speaking-It-So-Youre-Heard.pptx
+++ b/content/sessions/slides/Session-2-Speaking-It-So-Youre-Heard.pptx
@@ -3252,7 +3252,7 @@
               </a:spcAft>
             </a:pPr>
             <a:r>
-              <a:rPr sz="2700" i="1">
+              <a:rPr sz="2700" i="0">
                 <a:solidFill>
                   <a:srgbClr val="F5EFE3"/>
                 </a:solidFill>
@@ -3672,7 +3672,7 @@
               </a:spcAft>
             </a:pPr>
             <a:r>
-              <a:rPr sz="2700" i="1">
+              <a:rPr sz="2700" i="0">
                 <a:solidFill>
                   <a:srgbClr val="F5EFE3"/>
                 </a:solidFill>
@@ -3849,7 +3849,7 @@
               </a:spcAft>
             </a:pPr>
             <a:r>
-              <a:rPr sz="2700" i="1">
+              <a:rPr sz="2700" i="0">
                 <a:solidFill>
                   <a:srgbClr val="15110D"/>
                 </a:solidFill>
@@ -4251,7 +4251,7 @@
               </a:spcAft>
             </a:pPr>
             <a:r>
-              <a:rPr sz="2700" i="1">
+              <a:rPr sz="2700" i="0">
                 <a:solidFill>
                   <a:srgbClr val="F5EFE3"/>
                 </a:solidFill>
@@ -4687,7 +4687,7 @@
               </a:spcAft>
             </a:pPr>
             <a:r>
-              <a:rPr sz="2700" i="1">
+              <a:rPr sz="2700" i="0">
                 <a:solidFill>
                   <a:srgbClr val="F5EFE3"/>
                 </a:solidFill>
@@ -5107,7 +5107,7 @@
               </a:spcAft>
             </a:pPr>
             <a:r>
-              <a:rPr sz="2700" i="1">
+              <a:rPr sz="2700" i="0">
                 <a:solidFill>
                   <a:srgbClr val="15110D"/>
                 </a:solidFill>
@@ -5284,7 +5284,7 @@
               </a:spcAft>
             </a:pPr>
             <a:r>
-              <a:rPr sz="2700" i="1">
+              <a:rPr sz="2700" i="0">
                 <a:solidFill>
                   <a:srgbClr val="F5EFE3"/>
                 </a:solidFill>
@@ -5704,7 +5704,7 @@
               </a:spcAft>
             </a:pPr>
             <a:r>
-              <a:rPr sz="2700" i="1">
+              <a:rPr sz="2700" i="0">
                 <a:solidFill>
                   <a:srgbClr val="F5EFE3"/>
                 </a:solidFill>
@@ -6592,7 +6592,7 @@
               </a:spcAft>
             </a:pPr>
             <a:r>
-              <a:rPr sz="2700" i="1">
+              <a:rPr sz="2700" i="0">
                 <a:solidFill>
                   <a:srgbClr val="F5EFE3"/>
                 </a:solidFill>

--- a/content/sessions/slides/Session-2-Speaking-It-So-Youre-Heard.pptx
+++ b/content/sessions/slides/Session-2-Speaking-It-So-Youre-Heard.pptx
@@ -3100,7 +3100,7 @@
     <p:bg>
       <p:bgPr>
         <a:solidFill>
-          <a:srgbClr val="1F2A44"/>
+          <a:srgbClr val="1D283C"/>
         </a:solidFill>
         <a:effectLst/>
       </p:bgPr>
@@ -3137,7 +3137,7 @@
             <a:r>
               <a:rPr sz="1500" b="1">
                 <a:solidFill>
-                  <a:srgbClr val="C2A46D"/>
+                  <a:srgbClr val="C9A86D"/>
                 </a:solidFill>
                 <a:latin typeface="Lora"/>
               </a:rPr>
@@ -3171,7 +3171,7 @@
             <a:r>
               <a:rPr sz="5400">
                 <a:solidFill>
-                  <a:srgbClr val="F5EFE3"/>
+                  <a:srgbClr val="FCE8EA"/>
                 </a:solidFill>
                 <a:latin typeface="Marcellus"/>
               </a:rPr>
@@ -3195,7 +3195,7 @@
             <a:avLst/>
           </a:prstGeom>
           <a:solidFill>
-            <a:srgbClr val="C2A46D"/>
+            <a:srgbClr val="C9A86D"/>
           </a:solidFill>
           <a:ln>
             <a:noFill/>
@@ -3254,7 +3254,7 @@
             <a:r>
               <a:rPr sz="2700" i="0">
                 <a:solidFill>
-                  <a:srgbClr val="F5EFE3"/>
+                  <a:srgbClr val="FCE8EA"/>
                 </a:solidFill>
                 <a:latin typeface="Lora"/>
               </a:rPr>
@@ -3288,7 +3288,7 @@
             <a:r>
               <a:rPr sz="1100">
                 <a:solidFill>
-                  <a:srgbClr val="C2A46D"/>
+                  <a:srgbClr val="C9A86D"/>
                 </a:solidFill>
                 <a:latin typeface="Lora"/>
               </a:rPr>
@@ -3311,7 +3311,7 @@
     <p:bg>
       <p:bgPr>
         <a:solidFill>
-          <a:srgbClr val="9E4A2A"/>
+          <a:srgbClr val="224652"/>
         </a:solidFill>
         <a:effectLst/>
       </p:bgPr>
@@ -3348,7 +3348,7 @@
             <a:r>
               <a:rPr sz="1500" b="1">
                 <a:solidFill>
-                  <a:srgbClr val="C2A46D"/>
+                  <a:srgbClr val="C9A86D"/>
                 </a:solidFill>
                 <a:latin typeface="Lora"/>
               </a:rPr>
@@ -3382,7 +3382,7 @@
             <a:r>
               <a:rPr sz="4000">
                 <a:solidFill>
-                  <a:srgbClr val="F5EFE3"/>
+                  <a:srgbClr val="FCE8EA"/>
                 </a:solidFill>
                 <a:latin typeface="Marcellus"/>
               </a:rPr>
@@ -3406,7 +3406,7 @@
             <a:avLst/>
           </a:prstGeom>
           <a:solidFill>
-            <a:srgbClr val="C2A46D"/>
+            <a:srgbClr val="C9A86D"/>
           </a:solidFill>
           <a:ln>
             <a:noFill/>
@@ -3465,7 +3465,7 @@
             <a:r>
               <a:rPr sz="2300" i="0">
                 <a:solidFill>
-                  <a:srgbClr val="F5EFE3"/>
+                  <a:srgbClr val="FCE8EA"/>
                 </a:solidFill>
                 <a:latin typeface="Lora"/>
               </a:rPr>
@@ -3481,7 +3481,7 @@
             <a:r>
               <a:rPr sz="2300" i="0">
                 <a:solidFill>
-                  <a:srgbClr val="F5EFE3"/>
+                  <a:srgbClr val="FCE8EA"/>
                 </a:solidFill>
                 <a:latin typeface="Lora"/>
               </a:rPr>
@@ -3497,7 +3497,7 @@
             <a:r>
               <a:rPr sz="2300" i="0">
                 <a:solidFill>
-                  <a:srgbClr val="F5EFE3"/>
+                  <a:srgbClr val="FCE8EA"/>
                 </a:solidFill>
                 <a:latin typeface="Lora"/>
               </a:rPr>
@@ -3531,7 +3531,7 @@
             <a:r>
               <a:rPr sz="1100">
                 <a:solidFill>
-                  <a:srgbClr val="C2A46D"/>
+                  <a:srgbClr val="C9A86D"/>
                 </a:solidFill>
                 <a:latin typeface="Lora"/>
               </a:rPr>
@@ -3554,7 +3554,7 @@
     <p:bg>
       <p:bgPr>
         <a:solidFill>
-          <a:srgbClr val="6E1A2E"/>
+          <a:srgbClr val="74234F"/>
         </a:solidFill>
         <a:effectLst/>
       </p:bgPr>
@@ -3591,7 +3591,7 @@
             <a:r>
               <a:rPr sz="5400">
                 <a:solidFill>
-                  <a:srgbClr val="F5EFE3"/>
+                  <a:srgbClr val="FCE8EA"/>
                 </a:solidFill>
                 <a:latin typeface="Marcellus"/>
               </a:rPr>
@@ -3615,7 +3615,7 @@
             <a:avLst/>
           </a:prstGeom>
           <a:solidFill>
-            <a:srgbClr val="C2A46D"/>
+            <a:srgbClr val="C9A86D"/>
           </a:solidFill>
           <a:ln>
             <a:noFill/>
@@ -3674,7 +3674,7 @@
             <a:r>
               <a:rPr sz="2700" i="0">
                 <a:solidFill>
-                  <a:srgbClr val="F5EFE3"/>
+                  <a:srgbClr val="FCE8EA"/>
                 </a:solidFill>
                 <a:latin typeface="Lora"/>
               </a:rPr>
@@ -3708,7 +3708,7 @@
             <a:r>
               <a:rPr sz="1100">
                 <a:solidFill>
-                  <a:srgbClr val="C2A46D"/>
+                  <a:srgbClr val="C9A86D"/>
                 </a:solidFill>
                 <a:latin typeface="Lora"/>
               </a:rPr>
@@ -3731,7 +3731,7 @@
     <p:bg>
       <p:bgPr>
         <a:solidFill>
-          <a:srgbClr val="C2A46D"/>
+          <a:srgbClr val="C9A86D"/>
         </a:solidFill>
         <a:effectLst/>
       </p:bgPr>
@@ -3768,7 +3768,7 @@
             <a:r>
               <a:rPr sz="4000">
                 <a:solidFill>
-                  <a:srgbClr val="15110D"/>
+                  <a:srgbClr val="1D283C"/>
                 </a:solidFill>
                 <a:latin typeface="Marcellus"/>
               </a:rPr>
@@ -3792,7 +3792,7 @@
             <a:avLst/>
           </a:prstGeom>
           <a:solidFill>
-            <a:srgbClr val="6E1A2E"/>
+            <a:srgbClr val="74234F"/>
           </a:solidFill>
           <a:ln>
             <a:noFill/>
@@ -3851,7 +3851,7 @@
             <a:r>
               <a:rPr sz="2700" i="0">
                 <a:solidFill>
-                  <a:srgbClr val="15110D"/>
+                  <a:srgbClr val="1D283C"/>
                 </a:solidFill>
                 <a:latin typeface="Lora"/>
               </a:rPr>
@@ -3885,7 +3885,7 @@
             <a:r>
               <a:rPr sz="1100">
                 <a:solidFill>
-                  <a:srgbClr val="6E1A2E"/>
+                  <a:srgbClr val="74234F"/>
                 </a:solidFill>
                 <a:latin typeface="Lora"/>
               </a:rPr>
@@ -3908,7 +3908,7 @@
     <p:bg>
       <p:bgPr>
         <a:solidFill>
-          <a:srgbClr val="F5EFE3"/>
+          <a:srgbClr val="FCE8EA"/>
         </a:solidFill>
         <a:effectLst/>
       </p:bgPr>
@@ -3945,7 +3945,7 @@
             <a:r>
               <a:rPr sz="4000">
                 <a:solidFill>
-                  <a:srgbClr val="15110D"/>
+                  <a:srgbClr val="1D283C"/>
                 </a:solidFill>
                 <a:latin typeface="Marcellus"/>
               </a:rPr>
@@ -3969,7 +3969,7 @@
             <a:avLst/>
           </a:prstGeom>
           <a:solidFill>
-            <a:srgbClr val="C75D3D"/>
+            <a:srgbClr val="74234F"/>
           </a:solidFill>
           <a:ln>
             <a:noFill/>
@@ -4028,7 +4028,7 @@
             <a:r>
               <a:rPr sz="2300" i="0">
                 <a:solidFill>
-                  <a:srgbClr val="15110D"/>
+                  <a:srgbClr val="1D283C"/>
                 </a:solidFill>
                 <a:latin typeface="Lora"/>
               </a:rPr>
@@ -4044,7 +4044,7 @@
             <a:r>
               <a:rPr sz="2300" i="0">
                 <a:solidFill>
-                  <a:srgbClr val="15110D"/>
+                  <a:srgbClr val="1D283C"/>
                 </a:solidFill>
                 <a:latin typeface="Lora"/>
               </a:rPr>
@@ -4060,7 +4060,7 @@
             <a:r>
               <a:rPr sz="2300" i="0">
                 <a:solidFill>
-                  <a:srgbClr val="15110D"/>
+                  <a:srgbClr val="1D283C"/>
                 </a:solidFill>
                 <a:latin typeface="Lora"/>
               </a:rPr>
@@ -4076,7 +4076,7 @@
             <a:r>
               <a:rPr sz="2300" i="0">
                 <a:solidFill>
-                  <a:srgbClr val="15110D"/>
+                  <a:srgbClr val="1D283C"/>
                 </a:solidFill>
                 <a:latin typeface="Lora"/>
               </a:rPr>
@@ -4110,7 +4110,7 @@
             <a:r>
               <a:rPr sz="1100">
                 <a:solidFill>
-                  <a:srgbClr val="C75D3D"/>
+                  <a:srgbClr val="74234F"/>
                 </a:solidFill>
                 <a:latin typeface="Lora"/>
               </a:rPr>
@@ -4133,7 +4133,7 @@
     <p:bg>
       <p:bgPr>
         <a:solidFill>
-          <a:srgbClr val="C75D3D"/>
+          <a:srgbClr val="7CA1A5"/>
         </a:solidFill>
         <a:effectLst/>
       </p:bgPr>
@@ -4170,7 +4170,7 @@
             <a:r>
               <a:rPr sz="4000">
                 <a:solidFill>
-                  <a:srgbClr val="F5EFE3"/>
+                  <a:srgbClr val="1D283C"/>
                 </a:solidFill>
                 <a:latin typeface="Marcellus"/>
               </a:rPr>
@@ -4194,7 +4194,7 @@
             <a:avLst/>
           </a:prstGeom>
           <a:solidFill>
-            <a:srgbClr val="F5EFE3"/>
+            <a:srgbClr val="74234F"/>
           </a:solidFill>
           <a:ln>
             <a:noFill/>
@@ -4253,7 +4253,7 @@
             <a:r>
               <a:rPr sz="2700" i="0">
                 <a:solidFill>
-                  <a:srgbClr val="F5EFE3"/>
+                  <a:srgbClr val="1D283C"/>
                 </a:solidFill>
                 <a:latin typeface="Lora"/>
               </a:rPr>
@@ -4287,7 +4287,7 @@
             <a:r>
               <a:rPr sz="1100">
                 <a:solidFill>
-                  <a:srgbClr val="F5EFE3"/>
+                  <a:srgbClr val="74234F"/>
                 </a:solidFill>
                 <a:latin typeface="Lora"/>
               </a:rPr>
@@ -4310,7 +4310,7 @@
     <p:bg>
       <p:bgPr>
         <a:solidFill>
-          <a:srgbClr val="9E4A2A"/>
+          <a:srgbClr val="224652"/>
         </a:solidFill>
         <a:effectLst/>
       </p:bgPr>
@@ -4347,7 +4347,7 @@
             <a:r>
               <a:rPr sz="1500" b="1">
                 <a:solidFill>
-                  <a:srgbClr val="C2A46D"/>
+                  <a:srgbClr val="C9A86D"/>
                 </a:solidFill>
                 <a:latin typeface="Lora"/>
               </a:rPr>
@@ -4381,7 +4381,7 @@
             <a:r>
               <a:rPr sz="4000">
                 <a:solidFill>
-                  <a:srgbClr val="F5EFE3"/>
+                  <a:srgbClr val="FCE8EA"/>
                 </a:solidFill>
                 <a:latin typeface="Marcellus"/>
               </a:rPr>
@@ -4405,7 +4405,7 @@
             <a:avLst/>
           </a:prstGeom>
           <a:solidFill>
-            <a:srgbClr val="C2A46D"/>
+            <a:srgbClr val="C9A86D"/>
           </a:solidFill>
           <a:ln>
             <a:noFill/>
@@ -4464,7 +4464,7 @@
             <a:r>
               <a:rPr sz="2300" i="0">
                 <a:solidFill>
-                  <a:srgbClr val="F5EFE3"/>
+                  <a:srgbClr val="FCE8EA"/>
                 </a:solidFill>
                 <a:latin typeface="Lora"/>
               </a:rPr>
@@ -4480,7 +4480,7 @@
             <a:r>
               <a:rPr sz="2300" i="0">
                 <a:solidFill>
-                  <a:srgbClr val="F5EFE3"/>
+                  <a:srgbClr val="FCE8EA"/>
                 </a:solidFill>
                 <a:latin typeface="Lora"/>
               </a:rPr>
@@ -4496,7 +4496,7 @@
             <a:r>
               <a:rPr sz="2300" i="0">
                 <a:solidFill>
-                  <a:srgbClr val="F5EFE3"/>
+                  <a:srgbClr val="FCE8EA"/>
                 </a:solidFill>
                 <a:latin typeface="Lora"/>
               </a:rPr>
@@ -4512,7 +4512,7 @@
             <a:r>
               <a:rPr sz="2300" i="0">
                 <a:solidFill>
-                  <a:srgbClr val="F5EFE3"/>
+                  <a:srgbClr val="FCE8EA"/>
                 </a:solidFill>
                 <a:latin typeface="Lora"/>
               </a:rPr>
@@ -4546,7 +4546,7 @@
             <a:r>
               <a:rPr sz="1100">
                 <a:solidFill>
-                  <a:srgbClr val="C2A46D"/>
+                  <a:srgbClr val="C9A86D"/>
                 </a:solidFill>
                 <a:latin typeface="Lora"/>
               </a:rPr>
@@ -4569,7 +4569,7 @@
     <p:bg>
       <p:bgPr>
         <a:solidFill>
-          <a:srgbClr val="6E1A2E"/>
+          <a:srgbClr val="74234F"/>
         </a:solidFill>
         <a:effectLst/>
       </p:bgPr>
@@ -4606,7 +4606,7 @@
             <a:r>
               <a:rPr sz="4000">
                 <a:solidFill>
-                  <a:srgbClr val="F5EFE3"/>
+                  <a:srgbClr val="FCE8EA"/>
                 </a:solidFill>
                 <a:latin typeface="Marcellus"/>
               </a:rPr>
@@ -4630,7 +4630,7 @@
             <a:avLst/>
           </a:prstGeom>
           <a:solidFill>
-            <a:srgbClr val="C2A46D"/>
+            <a:srgbClr val="C9A86D"/>
           </a:solidFill>
           <a:ln>
             <a:noFill/>
@@ -4689,7 +4689,7 @@
             <a:r>
               <a:rPr sz="2700" i="0">
                 <a:solidFill>
-                  <a:srgbClr val="F5EFE3"/>
+                  <a:srgbClr val="FCE8EA"/>
                 </a:solidFill>
                 <a:latin typeface="Lora"/>
               </a:rPr>
@@ -4723,7 +4723,7 @@
             <a:r>
               <a:rPr sz="1100">
                 <a:solidFill>
-                  <a:srgbClr val="C2A46D"/>
+                  <a:srgbClr val="C9A86D"/>
                 </a:solidFill>
                 <a:latin typeface="Lora"/>
               </a:rPr>
@@ -4746,7 +4746,7 @@
     <p:bg>
       <p:bgPr>
         <a:solidFill>
-          <a:srgbClr val="F5EFE3"/>
+          <a:srgbClr val="FCE8EA"/>
         </a:solidFill>
         <a:effectLst/>
       </p:bgPr>
@@ -4783,7 +4783,7 @@
             <a:r>
               <a:rPr sz="1500" b="1">
                 <a:solidFill>
-                  <a:srgbClr val="C75D3D"/>
+                  <a:srgbClr val="74234F"/>
                 </a:solidFill>
                 <a:latin typeface="Lora"/>
               </a:rPr>
@@ -4817,7 +4817,7 @@
             <a:r>
               <a:rPr sz="4000">
                 <a:solidFill>
-                  <a:srgbClr val="15110D"/>
+                  <a:srgbClr val="1D283C"/>
                 </a:solidFill>
                 <a:latin typeface="Marcellus"/>
               </a:rPr>
@@ -4841,7 +4841,7 @@
             <a:avLst/>
           </a:prstGeom>
           <a:solidFill>
-            <a:srgbClr val="C75D3D"/>
+            <a:srgbClr val="74234F"/>
           </a:solidFill>
           <a:ln>
             <a:noFill/>
@@ -4900,7 +4900,7 @@
             <a:r>
               <a:rPr sz="2300" i="0">
                 <a:solidFill>
-                  <a:srgbClr val="15110D"/>
+                  <a:srgbClr val="1D283C"/>
                 </a:solidFill>
                 <a:latin typeface="Lora"/>
               </a:rPr>
@@ -4916,7 +4916,7 @@
             <a:r>
               <a:rPr sz="2300" i="0">
                 <a:solidFill>
-                  <a:srgbClr val="15110D"/>
+                  <a:srgbClr val="1D283C"/>
                 </a:solidFill>
                 <a:latin typeface="Lora"/>
               </a:rPr>
@@ -4932,7 +4932,7 @@
             <a:r>
               <a:rPr sz="2300" i="0">
                 <a:solidFill>
-                  <a:srgbClr val="15110D"/>
+                  <a:srgbClr val="1D283C"/>
                 </a:solidFill>
                 <a:latin typeface="Lora"/>
               </a:rPr>
@@ -4966,7 +4966,7 @@
             <a:r>
               <a:rPr sz="1100">
                 <a:solidFill>
-                  <a:srgbClr val="C75D3D"/>
+                  <a:srgbClr val="74234F"/>
                 </a:solidFill>
                 <a:latin typeface="Lora"/>
               </a:rPr>
@@ -4989,7 +4989,7 @@
     <p:bg>
       <p:bgPr>
         <a:solidFill>
-          <a:srgbClr val="F5EFE3"/>
+          <a:srgbClr val="FCE8EA"/>
         </a:solidFill>
         <a:effectLst/>
       </p:bgPr>
@@ -5026,7 +5026,7 @@
             <a:r>
               <a:rPr sz="4000">
                 <a:solidFill>
-                  <a:srgbClr val="15110D"/>
+                  <a:srgbClr val="1D283C"/>
                 </a:solidFill>
                 <a:latin typeface="Marcellus"/>
               </a:rPr>
@@ -5050,7 +5050,7 @@
             <a:avLst/>
           </a:prstGeom>
           <a:solidFill>
-            <a:srgbClr val="C75D3D"/>
+            <a:srgbClr val="74234F"/>
           </a:solidFill>
           <a:ln>
             <a:noFill/>
@@ -5109,7 +5109,7 @@
             <a:r>
               <a:rPr sz="2700" i="0">
                 <a:solidFill>
-                  <a:srgbClr val="15110D"/>
+                  <a:srgbClr val="1D283C"/>
                 </a:solidFill>
                 <a:latin typeface="Lora"/>
               </a:rPr>
@@ -5143,7 +5143,7 @@
             <a:r>
               <a:rPr sz="1100">
                 <a:solidFill>
-                  <a:srgbClr val="C75D3D"/>
+                  <a:srgbClr val="74234F"/>
                 </a:solidFill>
                 <a:latin typeface="Lora"/>
               </a:rPr>
@@ -5166,7 +5166,7 @@
     <p:bg>
       <p:bgPr>
         <a:solidFill>
-          <a:srgbClr val="6E1A2E"/>
+          <a:srgbClr val="74234F"/>
         </a:solidFill>
         <a:effectLst/>
       </p:bgPr>
@@ -5203,7 +5203,7 @@
             <a:r>
               <a:rPr sz="4000">
                 <a:solidFill>
-                  <a:srgbClr val="F5EFE3"/>
+                  <a:srgbClr val="FCE8EA"/>
                 </a:solidFill>
                 <a:latin typeface="Marcellus"/>
               </a:rPr>
@@ -5227,7 +5227,7 @@
             <a:avLst/>
           </a:prstGeom>
           <a:solidFill>
-            <a:srgbClr val="C2A46D"/>
+            <a:srgbClr val="C9A86D"/>
           </a:solidFill>
           <a:ln>
             <a:noFill/>
@@ -5286,7 +5286,7 @@
             <a:r>
               <a:rPr sz="2700" i="0">
                 <a:solidFill>
-                  <a:srgbClr val="F5EFE3"/>
+                  <a:srgbClr val="FCE8EA"/>
                 </a:solidFill>
                 <a:latin typeface="Lora"/>
               </a:rPr>
@@ -5320,7 +5320,7 @@
             <a:r>
               <a:rPr sz="1100">
                 <a:solidFill>
-                  <a:srgbClr val="C2A46D"/>
+                  <a:srgbClr val="C9A86D"/>
                 </a:solidFill>
                 <a:latin typeface="Lora"/>
               </a:rPr>
@@ -5343,7 +5343,7 @@
     <p:bg>
       <p:bgPr>
         <a:solidFill>
-          <a:srgbClr val="1F2A44"/>
+          <a:srgbClr val="1D283C"/>
         </a:solidFill>
         <a:effectLst/>
       </p:bgPr>
@@ -5380,7 +5380,7 @@
             <a:r>
               <a:rPr sz="1500" b="1">
                 <a:solidFill>
-                  <a:srgbClr val="C2A46D"/>
+                  <a:srgbClr val="C9A86D"/>
                 </a:solidFill>
                 <a:latin typeface="Lora"/>
               </a:rPr>
@@ -5414,7 +5414,7 @@
             <a:r>
               <a:rPr sz="4000">
                 <a:solidFill>
-                  <a:srgbClr val="F5EFE3"/>
+                  <a:srgbClr val="FCE8EA"/>
                 </a:solidFill>
                 <a:latin typeface="Marcellus"/>
               </a:rPr>
@@ -5438,7 +5438,7 @@
             <a:avLst/>
           </a:prstGeom>
           <a:solidFill>
-            <a:srgbClr val="C2A46D"/>
+            <a:srgbClr val="C9A86D"/>
           </a:solidFill>
           <a:ln>
             <a:noFill/>
@@ -5497,7 +5497,7 @@
             <a:r>
               <a:rPr sz="2300" i="0">
                 <a:solidFill>
-                  <a:srgbClr val="F5EFE3"/>
+                  <a:srgbClr val="FCE8EA"/>
                 </a:solidFill>
                 <a:latin typeface="Lora"/>
               </a:rPr>
@@ -5513,7 +5513,7 @@
             <a:r>
               <a:rPr sz="2300" i="0">
                 <a:solidFill>
-                  <a:srgbClr val="F5EFE3"/>
+                  <a:srgbClr val="FCE8EA"/>
                 </a:solidFill>
                 <a:latin typeface="Lora"/>
               </a:rPr>
@@ -5529,7 +5529,7 @@
             <a:r>
               <a:rPr sz="2300" i="0">
                 <a:solidFill>
-                  <a:srgbClr val="F5EFE3"/>
+                  <a:srgbClr val="FCE8EA"/>
                 </a:solidFill>
                 <a:latin typeface="Lora"/>
               </a:rPr>
@@ -5563,7 +5563,7 @@
             <a:r>
               <a:rPr sz="1100">
                 <a:solidFill>
-                  <a:srgbClr val="C2A46D"/>
+                  <a:srgbClr val="C9A86D"/>
                 </a:solidFill>
                 <a:latin typeface="Lora"/>
               </a:rPr>
@@ -5586,7 +5586,7 @@
     <p:bg>
       <p:bgPr>
         <a:solidFill>
-          <a:srgbClr val="9E4A2A"/>
+          <a:srgbClr val="224652"/>
         </a:solidFill>
         <a:effectLst/>
       </p:bgPr>
@@ -5623,7 +5623,7 @@
             <a:r>
               <a:rPr sz="4000">
                 <a:solidFill>
-                  <a:srgbClr val="F5EFE3"/>
+                  <a:srgbClr val="FCE8EA"/>
                 </a:solidFill>
                 <a:latin typeface="Marcellus"/>
               </a:rPr>
@@ -5647,7 +5647,7 @@
             <a:avLst/>
           </a:prstGeom>
           <a:solidFill>
-            <a:srgbClr val="C2A46D"/>
+            <a:srgbClr val="C9A86D"/>
           </a:solidFill>
           <a:ln>
             <a:noFill/>
@@ -5706,7 +5706,7 @@
             <a:r>
               <a:rPr sz="2700" i="0">
                 <a:solidFill>
-                  <a:srgbClr val="F5EFE3"/>
+                  <a:srgbClr val="FCE8EA"/>
                 </a:solidFill>
                 <a:latin typeface="Lora"/>
               </a:rPr>
@@ -5740,7 +5740,7 @@
             <a:r>
               <a:rPr sz="1100">
                 <a:solidFill>
-                  <a:srgbClr val="C2A46D"/>
+                  <a:srgbClr val="C9A86D"/>
                 </a:solidFill>
                 <a:latin typeface="Lora"/>
               </a:rPr>
@@ -5763,7 +5763,7 @@
     <p:bg>
       <p:bgPr>
         <a:solidFill>
-          <a:srgbClr val="F5EFE3"/>
+          <a:srgbClr val="FCE8EA"/>
         </a:solidFill>
         <a:effectLst/>
       </p:bgPr>
@@ -5800,7 +5800,7 @@
             <a:r>
               <a:rPr sz="4000">
                 <a:solidFill>
-                  <a:srgbClr val="15110D"/>
+                  <a:srgbClr val="1D283C"/>
                 </a:solidFill>
                 <a:latin typeface="Marcellus"/>
               </a:rPr>
@@ -5824,7 +5824,7 @@
             <a:avLst/>
           </a:prstGeom>
           <a:solidFill>
-            <a:srgbClr val="C75D3D"/>
+            <a:srgbClr val="74234F"/>
           </a:solidFill>
           <a:ln>
             <a:noFill/>
@@ -5883,7 +5883,7 @@
             <a:r>
               <a:rPr sz="2300" i="0">
                 <a:solidFill>
-                  <a:srgbClr val="15110D"/>
+                  <a:srgbClr val="1D283C"/>
                 </a:solidFill>
                 <a:latin typeface="Lora"/>
               </a:rPr>
@@ -5899,7 +5899,7 @@
             <a:r>
               <a:rPr sz="2300" i="0">
                 <a:solidFill>
-                  <a:srgbClr val="15110D"/>
+                  <a:srgbClr val="1D283C"/>
                 </a:solidFill>
                 <a:latin typeface="Lora"/>
               </a:rPr>
@@ -5915,7 +5915,7 @@
             <a:r>
               <a:rPr sz="2300" i="0">
                 <a:solidFill>
-                  <a:srgbClr val="15110D"/>
+                  <a:srgbClr val="1D283C"/>
                 </a:solidFill>
                 <a:latin typeface="Lora"/>
               </a:rPr>
@@ -5949,7 +5949,7 @@
             <a:r>
               <a:rPr sz="1100">
                 <a:solidFill>
-                  <a:srgbClr val="C75D3D"/>
+                  <a:srgbClr val="74234F"/>
                 </a:solidFill>
                 <a:latin typeface="Lora"/>
               </a:rPr>
@@ -5972,7 +5972,7 @@
     <p:bg>
       <p:bgPr>
         <a:solidFill>
-          <a:srgbClr val="C75D3D"/>
+          <a:srgbClr val="7CA1A5"/>
         </a:solidFill>
         <a:effectLst/>
       </p:bgPr>
@@ -6009,7 +6009,7 @@
             <a:r>
               <a:rPr sz="1500" b="1">
                 <a:solidFill>
-                  <a:srgbClr val="F5EFE3"/>
+                  <a:srgbClr val="74234F"/>
                 </a:solidFill>
                 <a:latin typeface="Lora"/>
               </a:rPr>
@@ -6043,7 +6043,7 @@
             <a:r>
               <a:rPr sz="4000">
                 <a:solidFill>
-                  <a:srgbClr val="F5EFE3"/>
+                  <a:srgbClr val="1D283C"/>
                 </a:solidFill>
                 <a:latin typeface="Marcellus"/>
               </a:rPr>
@@ -6067,7 +6067,7 @@
             <a:avLst/>
           </a:prstGeom>
           <a:solidFill>
-            <a:srgbClr val="F5EFE3"/>
+            <a:srgbClr val="74234F"/>
           </a:solidFill>
           <a:ln>
             <a:noFill/>
@@ -6126,7 +6126,7 @@
             <a:r>
               <a:rPr sz="2300" i="0">
                 <a:solidFill>
-                  <a:srgbClr val="F5EFE3"/>
+                  <a:srgbClr val="1D283C"/>
                 </a:solidFill>
                 <a:latin typeface="Lora"/>
               </a:rPr>
@@ -6142,7 +6142,7 @@
             <a:r>
               <a:rPr sz="2300" i="0">
                 <a:solidFill>
-                  <a:srgbClr val="F5EFE3"/>
+                  <a:srgbClr val="1D283C"/>
                 </a:solidFill>
                 <a:latin typeface="Lora"/>
               </a:rPr>
@@ -6158,7 +6158,7 @@
             <a:r>
               <a:rPr sz="2300" i="0">
                 <a:solidFill>
-                  <a:srgbClr val="F5EFE3"/>
+                  <a:srgbClr val="1D283C"/>
                 </a:solidFill>
                 <a:latin typeface="Lora"/>
               </a:rPr>
@@ -6192,7 +6192,7 @@
             <a:r>
               <a:rPr sz="1100">
                 <a:solidFill>
-                  <a:srgbClr val="F5EFE3"/>
+                  <a:srgbClr val="74234F"/>
                 </a:solidFill>
                 <a:latin typeface="Lora"/>
               </a:rPr>
@@ -6215,7 +6215,7 @@
     <p:bg>
       <p:bgPr>
         <a:solidFill>
-          <a:srgbClr val="6E1A2E"/>
+          <a:srgbClr val="74234F"/>
         </a:solidFill>
         <a:effectLst/>
       </p:bgPr>
@@ -6252,7 +6252,7 @@
             <a:r>
               <a:rPr sz="1500" b="1">
                 <a:solidFill>
-                  <a:srgbClr val="C2A46D"/>
+                  <a:srgbClr val="C9A86D"/>
                 </a:solidFill>
                 <a:latin typeface="Lora"/>
               </a:rPr>
@@ -6286,7 +6286,7 @@
             <a:r>
               <a:rPr sz="4000">
                 <a:solidFill>
-                  <a:srgbClr val="F5EFE3"/>
+                  <a:srgbClr val="FCE8EA"/>
                 </a:solidFill>
                 <a:latin typeface="Marcellus"/>
               </a:rPr>
@@ -6310,7 +6310,7 @@
             <a:avLst/>
           </a:prstGeom>
           <a:solidFill>
-            <a:srgbClr val="C2A46D"/>
+            <a:srgbClr val="C9A86D"/>
           </a:solidFill>
           <a:ln>
             <a:noFill/>
@@ -6369,7 +6369,7 @@
             <a:r>
               <a:rPr sz="2300" i="0">
                 <a:solidFill>
-                  <a:srgbClr val="F5EFE3"/>
+                  <a:srgbClr val="FCE8EA"/>
                 </a:solidFill>
                 <a:latin typeface="Lora"/>
               </a:rPr>
@@ -6385,7 +6385,7 @@
             <a:r>
               <a:rPr sz="2300" i="0">
                 <a:solidFill>
-                  <a:srgbClr val="F5EFE3"/>
+                  <a:srgbClr val="FCE8EA"/>
                 </a:solidFill>
                 <a:latin typeface="Lora"/>
               </a:rPr>
@@ -6401,7 +6401,7 @@
             <a:r>
               <a:rPr sz="2300" i="0">
                 <a:solidFill>
-                  <a:srgbClr val="F5EFE3"/>
+                  <a:srgbClr val="FCE8EA"/>
                 </a:solidFill>
                 <a:latin typeface="Lora"/>
               </a:rPr>
@@ -6417,7 +6417,7 @@
             <a:r>
               <a:rPr sz="2300" i="0">
                 <a:solidFill>
-                  <a:srgbClr val="F5EFE3"/>
+                  <a:srgbClr val="FCE8EA"/>
                 </a:solidFill>
                 <a:latin typeface="Lora"/>
               </a:rPr>
@@ -6451,7 +6451,7 @@
             <a:r>
               <a:rPr sz="1100">
                 <a:solidFill>
-                  <a:srgbClr val="C2A46D"/>
+                  <a:srgbClr val="C9A86D"/>
                 </a:solidFill>
                 <a:latin typeface="Lora"/>
               </a:rPr>
@@ -6474,7 +6474,7 @@
     <p:bg>
       <p:bgPr>
         <a:solidFill>
-          <a:srgbClr val="1F2A44"/>
+          <a:srgbClr val="1D283C"/>
         </a:solidFill>
         <a:effectLst/>
       </p:bgPr>
@@ -6511,7 +6511,7 @@
             <a:r>
               <a:rPr sz="4000">
                 <a:solidFill>
-                  <a:srgbClr val="F5EFE3"/>
+                  <a:srgbClr val="FCE8EA"/>
                 </a:solidFill>
                 <a:latin typeface="Marcellus"/>
               </a:rPr>
@@ -6535,7 +6535,7 @@
             <a:avLst/>
           </a:prstGeom>
           <a:solidFill>
-            <a:srgbClr val="C2A46D"/>
+            <a:srgbClr val="C9A86D"/>
           </a:solidFill>
           <a:ln>
             <a:noFill/>
@@ -6594,7 +6594,7 @@
             <a:r>
               <a:rPr sz="2700" i="0">
                 <a:solidFill>
-                  <a:srgbClr val="F5EFE3"/>
+                  <a:srgbClr val="FCE8EA"/>
                 </a:solidFill>
                 <a:latin typeface="Lora"/>
               </a:rPr>
@@ -6628,7 +6628,7 @@
             <a:r>
               <a:rPr sz="1100">
                 <a:solidFill>
-                  <a:srgbClr val="C2A46D"/>
+                  <a:srgbClr val="C9A86D"/>
                 </a:solidFill>
                 <a:latin typeface="Lora"/>
               </a:rPr>
